--- a/lectures/Week10_Spring-Boot_FinalPrep/1_Microservices_V4.pptx
+++ b/lectures/Week10_Spring-Boot_FinalPrep/1_Microservices_V4.pptx
@@ -7,10 +7,10 @@
     <p:sldMasterId id="2147483687" r:id="rId3"/>
   </p:sldMasterIdLst>
   <p:notesMasterIdLst>
-    <p:notesMasterId r:id="rId58"/>
+    <p:notesMasterId r:id="rId59"/>
   </p:notesMasterIdLst>
   <p:handoutMasterIdLst>
-    <p:handoutMasterId r:id="rId59"/>
+    <p:handoutMasterId r:id="rId60"/>
   </p:handoutMasterIdLst>
   <p:sldIdLst>
     <p:sldId id="463" r:id="rId4"/>
@@ -67,6 +67,7 @@
     <p:sldId id="271" r:id="rId55"/>
     <p:sldId id="269" r:id="rId56"/>
     <p:sldId id="336" r:id="rId57"/>
+    <p:sldId id="509" r:id="rId58"/>
   </p:sldIdLst>
   <p:sldSz cx="12192000" cy="6858000"/>
   <p:notesSz cx="7010400" cy="9296400"/>
@@ -255,7 +256,7 @@
           <a:p>
             <a:fld id="{8E938536-29D3-49BD-A567-41CAF057586A}" type="datetimeFigureOut">
               <a:rPr lang="en-US" smtClean="0"/>
-              <a:t>8/22/2026</a:t>
+              <a:t>9/22/2026</a:t>
             </a:fld>
             <a:endParaRPr lang="en-US"/>
           </a:p>
@@ -420,7 +421,7 @@
           <a:p>
             <a:fld id="{71559A16-B3AD-4CE2-9A5E-FAAD3C2C27CA}" type="datetimeFigureOut">
               <a:rPr lang="en-US" smtClean="0"/>
-              <a:t>8/22/2026</a:t>
+              <a:t>9/22/2026</a:t>
             </a:fld>
             <a:endParaRPr lang="en-US"/>
           </a:p>
@@ -4032,7 +4033,7 @@
           <a:p>
             <a:fld id="{1D8BD707-D9CF-40AE-B4C6-C98DA3205C09}" type="datetimeFigureOut">
               <a:rPr lang="en-US"/>
-              <a:t>8/22/2026</a:t>
+              <a:t>9/22/2026</a:t>
             </a:fld>
             <a:endParaRPr lang="en-US"/>
           </a:p>
@@ -4414,7 +4415,7 @@
           </a:ln>
           <a:extLst>
             <a:ext uri="{C572A759-6A51-4108-AA02-DFA0A04FC94B}">
-              <ma14:wrappingTextBoxFlag xmlns:ma14="http://schemas.microsoft.com/office/mac/drawingml/2011/main" xmlns:a14="http://schemas.microsoft.com/office/drawing/2010/main" xmlns:m="http://schemas.openxmlformats.org/officeDocument/2006/math" xmlns="" val="1"/>
+              <ma14:wrappingTextBoxFlag xmlns="" xmlns:m="http://schemas.openxmlformats.org/officeDocument/2006/math" xmlns:a14="http://schemas.microsoft.com/office/drawing/2010/main" xmlns:ma14="http://schemas.microsoft.com/office/mac/drawingml/2011/main" val="1"/>
             </a:ext>
           </a:extLst>
         </p:spPr>
@@ -12488,7 +12489,7 @@
           </a:ln>
           <a:extLst>
             <a:ext uri="{C572A759-6A51-4108-AA02-DFA0A04FC94B}">
-              <ma14:wrappingTextBoxFlag xmlns="" xmlns:m="http://schemas.openxmlformats.org/officeDocument/2006/math" xmlns:a14="http://schemas.microsoft.com/office/drawing/2010/main" xmlns:ma14="http://schemas.microsoft.com/office/mac/drawingml/2011/main" val="1"/>
+              <ma14:wrappingTextBoxFlag xmlns:ma14="http://schemas.microsoft.com/office/mac/drawingml/2011/main" xmlns:a14="http://schemas.microsoft.com/office/drawing/2010/main" xmlns:m="http://schemas.openxmlformats.org/officeDocument/2006/math" xmlns="" val="1"/>
             </a:ext>
           </a:extLst>
         </p:spPr>
@@ -13116,7 +13117,7 @@
           </a:ln>
           <a:extLst>
             <a:ext uri="{C572A759-6A51-4108-AA02-DFA0A04FC94B}">
-              <ma14:wrappingTextBoxFlag xmlns="" xmlns:m="http://schemas.openxmlformats.org/officeDocument/2006/math" xmlns:a14="http://schemas.microsoft.com/office/drawing/2010/main" xmlns:ma14="http://schemas.microsoft.com/office/mac/drawingml/2011/main" val="1"/>
+              <ma14:wrappingTextBoxFlag xmlns:ma14="http://schemas.microsoft.com/office/mac/drawingml/2011/main" xmlns:a14="http://schemas.microsoft.com/office/drawing/2010/main" xmlns:m="http://schemas.openxmlformats.org/officeDocument/2006/math" xmlns="" val="1"/>
             </a:ext>
           </a:extLst>
         </p:spPr>
@@ -13703,7 +13704,7 @@
           </a:ln>
           <a:extLst>
             <a:ext uri="{C572A759-6A51-4108-AA02-DFA0A04FC94B}">
-              <ma14:wrappingTextBoxFlag xmlns="" xmlns:m="http://schemas.openxmlformats.org/officeDocument/2006/math" xmlns:a14="http://schemas.microsoft.com/office/drawing/2010/main" xmlns:ma14="http://schemas.microsoft.com/office/mac/drawingml/2011/main" val="1"/>
+              <ma14:wrappingTextBoxFlag xmlns:ma14="http://schemas.microsoft.com/office/mac/drawingml/2011/main" xmlns:a14="http://schemas.microsoft.com/office/drawing/2010/main" xmlns:m="http://schemas.openxmlformats.org/officeDocument/2006/math" xmlns="" val="1"/>
             </a:ext>
           </a:extLst>
         </p:spPr>
@@ -14316,7 +14317,7 @@
           </a:ln>
           <a:extLst>
             <a:ext uri="{C572A759-6A51-4108-AA02-DFA0A04FC94B}">
-              <ma14:wrappingTextBoxFlag xmlns="" xmlns:m="http://schemas.openxmlformats.org/officeDocument/2006/math" xmlns:a14="http://schemas.microsoft.com/office/drawing/2010/main" xmlns:ma14="http://schemas.microsoft.com/office/mac/drawingml/2011/main" val="1"/>
+              <ma14:wrappingTextBoxFlag xmlns:ma14="http://schemas.microsoft.com/office/mac/drawingml/2011/main" xmlns:a14="http://schemas.microsoft.com/office/drawing/2010/main" xmlns:m="http://schemas.openxmlformats.org/officeDocument/2006/math" xmlns="" val="1"/>
             </a:ext>
           </a:extLst>
         </p:spPr>
@@ -14961,7 +14962,7 @@
           </a:ln>
           <a:extLst>
             <a:ext uri="{C572A759-6A51-4108-AA02-DFA0A04FC94B}">
-              <ma14:wrappingTextBoxFlag xmlns="" xmlns:m="http://schemas.openxmlformats.org/officeDocument/2006/math" xmlns:a14="http://schemas.microsoft.com/office/drawing/2010/main" xmlns:ma14="http://schemas.microsoft.com/office/mac/drawingml/2011/main" val="1"/>
+              <ma14:wrappingTextBoxFlag xmlns:ma14="http://schemas.microsoft.com/office/mac/drawingml/2011/main" xmlns:a14="http://schemas.microsoft.com/office/drawing/2010/main" xmlns:m="http://schemas.openxmlformats.org/officeDocument/2006/math" xmlns="" val="1"/>
             </a:ext>
           </a:extLst>
         </p:spPr>
@@ -15698,7 +15699,7 @@
           </a:ln>
           <a:extLst>
             <a:ext uri="{C572A759-6A51-4108-AA02-DFA0A04FC94B}">
-              <ma14:wrappingTextBoxFlag xmlns="" xmlns:m="http://schemas.openxmlformats.org/officeDocument/2006/math" xmlns:a14="http://schemas.microsoft.com/office/drawing/2010/main" xmlns:ma14="http://schemas.microsoft.com/office/mac/drawingml/2011/main" val="1"/>
+              <ma14:wrappingTextBoxFlag xmlns:ma14="http://schemas.microsoft.com/office/mac/drawingml/2011/main" xmlns:a14="http://schemas.microsoft.com/office/drawing/2010/main" xmlns:m="http://schemas.openxmlformats.org/officeDocument/2006/math" xmlns="" val="1"/>
             </a:ext>
           </a:extLst>
         </p:spPr>
@@ -16362,7 +16363,7 @@
           </a:ln>
           <a:extLst>
             <a:ext uri="{C572A759-6A51-4108-AA02-DFA0A04FC94B}">
-              <ma14:wrappingTextBoxFlag xmlns="" xmlns:m="http://schemas.openxmlformats.org/officeDocument/2006/math" xmlns:a14="http://schemas.microsoft.com/office/drawing/2010/main" xmlns:ma14="http://schemas.microsoft.com/office/mac/drawingml/2011/main" val="1"/>
+              <ma14:wrappingTextBoxFlag xmlns:ma14="http://schemas.microsoft.com/office/mac/drawingml/2011/main" xmlns:a14="http://schemas.microsoft.com/office/drawing/2010/main" xmlns:m="http://schemas.openxmlformats.org/officeDocument/2006/math" xmlns="" val="1"/>
             </a:ext>
           </a:extLst>
         </p:spPr>
@@ -17115,7 +17116,7 @@
           </a:ln>
           <a:extLst>
             <a:ext uri="{C572A759-6A51-4108-AA02-DFA0A04FC94B}">
-              <ma14:wrappingTextBoxFlag xmlns="" xmlns:m="http://schemas.openxmlformats.org/officeDocument/2006/math" xmlns:a14="http://schemas.microsoft.com/office/drawing/2010/main" xmlns:ma14="http://schemas.microsoft.com/office/mac/drawingml/2011/main" val="1"/>
+              <ma14:wrappingTextBoxFlag xmlns:ma14="http://schemas.microsoft.com/office/mac/drawingml/2011/main" xmlns:a14="http://schemas.microsoft.com/office/drawing/2010/main" xmlns:m="http://schemas.openxmlformats.org/officeDocument/2006/math" xmlns="" val="1"/>
             </a:ext>
           </a:extLst>
         </p:spPr>
@@ -17853,7 +17854,7 @@
           </a:ln>
           <a:extLst>
             <a:ext uri="{C572A759-6A51-4108-AA02-DFA0A04FC94B}">
-              <ma14:wrappingTextBoxFlag xmlns="" xmlns:m="http://schemas.openxmlformats.org/officeDocument/2006/math" xmlns:a14="http://schemas.microsoft.com/office/drawing/2010/main" xmlns:ma14="http://schemas.microsoft.com/office/mac/drawingml/2011/main" val="1"/>
+              <ma14:wrappingTextBoxFlag xmlns:ma14="http://schemas.microsoft.com/office/mac/drawingml/2011/main" xmlns:a14="http://schemas.microsoft.com/office/drawing/2010/main" xmlns:m="http://schemas.openxmlformats.org/officeDocument/2006/math" xmlns="" val="1"/>
             </a:ext>
           </a:extLst>
         </p:spPr>
@@ -18448,7 +18449,7 @@
           </a:ln>
           <a:extLst>
             <a:ext uri="{C572A759-6A51-4108-AA02-DFA0A04FC94B}">
-              <ma14:wrappingTextBoxFlag xmlns="" xmlns:m="http://schemas.openxmlformats.org/officeDocument/2006/math" xmlns:a14="http://schemas.microsoft.com/office/drawing/2010/main" xmlns:ma14="http://schemas.microsoft.com/office/mac/drawingml/2011/main" val="1"/>
+              <ma14:wrappingTextBoxFlag xmlns:ma14="http://schemas.microsoft.com/office/mac/drawingml/2011/main" xmlns:a14="http://schemas.microsoft.com/office/drawing/2010/main" xmlns:m="http://schemas.openxmlformats.org/officeDocument/2006/math" xmlns="" val="1"/>
             </a:ext>
           </a:extLst>
         </p:spPr>
@@ -19097,7 +19098,7 @@
           </a:ln>
           <a:extLst>
             <a:ext uri="{C572A759-6A51-4108-AA02-DFA0A04FC94B}">
-              <ma14:wrappingTextBoxFlag xmlns="" xmlns:m="http://schemas.openxmlformats.org/officeDocument/2006/math" xmlns:a14="http://schemas.microsoft.com/office/drawing/2010/main" xmlns:ma14="http://schemas.microsoft.com/office/mac/drawingml/2011/main" val="1"/>
+              <ma14:wrappingTextBoxFlag xmlns:ma14="http://schemas.microsoft.com/office/mac/drawingml/2011/main" xmlns:a14="http://schemas.microsoft.com/office/drawing/2010/main" xmlns:m="http://schemas.openxmlformats.org/officeDocument/2006/math" xmlns="" val="1"/>
             </a:ext>
           </a:extLst>
         </p:spPr>
@@ -19903,7 +19904,7 @@
           </a:ln>
           <a:extLst>
             <a:ext uri="{C572A759-6A51-4108-AA02-DFA0A04FC94B}">
-              <ma14:wrappingTextBoxFlag xmlns="" xmlns:m="http://schemas.openxmlformats.org/officeDocument/2006/math" xmlns:a14="http://schemas.microsoft.com/office/drawing/2010/main" xmlns:ma14="http://schemas.microsoft.com/office/mac/drawingml/2011/main" val="1"/>
+              <ma14:wrappingTextBoxFlag xmlns:ma14="http://schemas.microsoft.com/office/mac/drawingml/2011/main" xmlns:a14="http://schemas.microsoft.com/office/drawing/2010/main" xmlns:m="http://schemas.openxmlformats.org/officeDocument/2006/math" xmlns="" val="1"/>
             </a:ext>
           </a:extLst>
         </p:spPr>
@@ -20574,7 +20575,7 @@
           </a:ln>
           <a:extLst>
             <a:ext uri="{C572A759-6A51-4108-AA02-DFA0A04FC94B}">
-              <ma14:wrappingTextBoxFlag xmlns="" xmlns:m="http://schemas.openxmlformats.org/officeDocument/2006/math" xmlns:a14="http://schemas.microsoft.com/office/drawing/2010/main" xmlns:ma14="http://schemas.microsoft.com/office/mac/drawingml/2011/main" val="1"/>
+              <ma14:wrappingTextBoxFlag xmlns:ma14="http://schemas.microsoft.com/office/mac/drawingml/2011/main" xmlns:a14="http://schemas.microsoft.com/office/drawing/2010/main" xmlns:m="http://schemas.openxmlformats.org/officeDocument/2006/math" xmlns="" val="1"/>
             </a:ext>
           </a:extLst>
         </p:spPr>
@@ -21425,7 +21426,7 @@
           </a:ln>
           <a:extLst>
             <a:ext uri="{C572A759-6A51-4108-AA02-DFA0A04FC94B}">
-              <ma14:wrappingTextBoxFlag xmlns="" xmlns:m="http://schemas.openxmlformats.org/officeDocument/2006/math" xmlns:a14="http://schemas.microsoft.com/office/drawing/2010/main" xmlns:ma14="http://schemas.microsoft.com/office/mac/drawingml/2011/main" val="1"/>
+              <ma14:wrappingTextBoxFlag xmlns:ma14="http://schemas.microsoft.com/office/mac/drawingml/2011/main" xmlns:a14="http://schemas.microsoft.com/office/drawing/2010/main" xmlns:m="http://schemas.openxmlformats.org/officeDocument/2006/math" xmlns="" val="1"/>
             </a:ext>
           </a:extLst>
         </p:spPr>
@@ -22094,7 +22095,7 @@
           </a:ln>
           <a:extLst>
             <a:ext uri="{C572A759-6A51-4108-AA02-DFA0A04FC94B}">
-              <ma14:wrappingTextBoxFlag xmlns="" xmlns:m="http://schemas.openxmlformats.org/officeDocument/2006/math" xmlns:a14="http://schemas.microsoft.com/office/drawing/2010/main" xmlns:ma14="http://schemas.microsoft.com/office/mac/drawingml/2011/main" val="1"/>
+              <ma14:wrappingTextBoxFlag xmlns:ma14="http://schemas.microsoft.com/office/mac/drawingml/2011/main" xmlns:a14="http://schemas.microsoft.com/office/drawing/2010/main" xmlns:m="http://schemas.openxmlformats.org/officeDocument/2006/math" xmlns="" val="1"/>
             </a:ext>
           </a:extLst>
         </p:spPr>
@@ -22841,7 +22842,7 @@
           </a:ln>
           <a:extLst>
             <a:ext uri="{C572A759-6A51-4108-AA02-DFA0A04FC94B}">
-              <ma14:wrappingTextBoxFlag xmlns="" xmlns:m="http://schemas.openxmlformats.org/officeDocument/2006/math" xmlns:a14="http://schemas.microsoft.com/office/drawing/2010/main" xmlns:ma14="http://schemas.microsoft.com/office/mac/drawingml/2011/main" val="1"/>
+              <ma14:wrappingTextBoxFlag xmlns:ma14="http://schemas.microsoft.com/office/mac/drawingml/2011/main" xmlns:a14="http://schemas.microsoft.com/office/drawing/2010/main" xmlns:m="http://schemas.openxmlformats.org/officeDocument/2006/math" xmlns="" val="1"/>
             </a:ext>
           </a:extLst>
         </p:spPr>
@@ -25288,7 +25289,7 @@
           </a:ln>
           <a:extLst>
             <a:ext uri="{C572A759-6A51-4108-AA02-DFA0A04FC94B}">
-              <ma14:wrappingTextBoxFlag xmlns="" xmlns:m="http://schemas.openxmlformats.org/officeDocument/2006/math" xmlns:a14="http://schemas.microsoft.com/office/drawing/2010/main" xmlns:ma14="http://schemas.microsoft.com/office/mac/drawingml/2011/main" val="1"/>
+              <ma14:wrappingTextBoxFlag xmlns:ma14="http://schemas.microsoft.com/office/mac/drawingml/2011/main" xmlns:a14="http://schemas.microsoft.com/office/drawing/2010/main" xmlns:m="http://schemas.openxmlformats.org/officeDocument/2006/math" xmlns="" val="1"/>
             </a:ext>
           </a:extLst>
         </p:spPr>
@@ -25938,7 +25939,7 @@
           </a:ln>
           <a:extLst>
             <a:ext uri="{C572A759-6A51-4108-AA02-DFA0A04FC94B}">
-              <ma14:wrappingTextBoxFlag xmlns="" xmlns:m="http://schemas.openxmlformats.org/officeDocument/2006/math" xmlns:a14="http://schemas.microsoft.com/office/drawing/2010/main" xmlns:ma14="http://schemas.microsoft.com/office/mac/drawingml/2011/main" val="1"/>
+              <ma14:wrappingTextBoxFlag xmlns:ma14="http://schemas.microsoft.com/office/mac/drawingml/2011/main" xmlns:a14="http://schemas.microsoft.com/office/drawing/2010/main" xmlns:m="http://schemas.openxmlformats.org/officeDocument/2006/math" xmlns="" val="1"/>
             </a:ext>
           </a:extLst>
         </p:spPr>
@@ -28372,7 +28373,7 @@
           </a:ln>
           <a:extLst>
             <a:ext uri="{C572A759-6A51-4108-AA02-DFA0A04FC94B}">
-              <ma14:wrappingTextBoxFlag xmlns="" xmlns:m="http://schemas.openxmlformats.org/officeDocument/2006/math" xmlns:a14="http://schemas.microsoft.com/office/drawing/2010/main" xmlns:ma14="http://schemas.microsoft.com/office/mac/drawingml/2011/main" val="1"/>
+              <ma14:wrappingTextBoxFlag xmlns:ma14="http://schemas.microsoft.com/office/mac/drawingml/2011/main" xmlns:a14="http://schemas.microsoft.com/office/drawing/2010/main" xmlns:m="http://schemas.openxmlformats.org/officeDocument/2006/math" xmlns="" val="1"/>
             </a:ext>
           </a:extLst>
         </p:spPr>
@@ -29570,7 +29571,7 @@
           </a:ln>
           <a:extLst>
             <a:ext uri="{C572A759-6A51-4108-AA02-DFA0A04FC94B}">
-              <ma14:wrappingTextBoxFlag xmlns="" xmlns:m="http://schemas.openxmlformats.org/officeDocument/2006/math" xmlns:a14="http://schemas.microsoft.com/office/drawing/2010/main" xmlns:ma14="http://schemas.microsoft.com/office/mac/drawingml/2011/main" val="1"/>
+              <ma14:wrappingTextBoxFlag xmlns:ma14="http://schemas.microsoft.com/office/mac/drawingml/2011/main" xmlns:a14="http://schemas.microsoft.com/office/drawing/2010/main" xmlns:m="http://schemas.openxmlformats.org/officeDocument/2006/math" xmlns="" val="1"/>
             </a:ext>
           </a:extLst>
         </p:spPr>
@@ -30164,7 +30165,7 @@
           </a:ln>
           <a:extLst>
             <a:ext uri="{C572A759-6A51-4108-AA02-DFA0A04FC94B}">
-              <ma14:wrappingTextBoxFlag xmlns="" xmlns:m="http://schemas.openxmlformats.org/officeDocument/2006/math" xmlns:a14="http://schemas.microsoft.com/office/drawing/2010/main" xmlns:ma14="http://schemas.microsoft.com/office/mac/drawingml/2011/main" val="1"/>
+              <ma14:wrappingTextBoxFlag xmlns:ma14="http://schemas.microsoft.com/office/mac/drawingml/2011/main" xmlns:a14="http://schemas.microsoft.com/office/drawing/2010/main" xmlns:m="http://schemas.openxmlformats.org/officeDocument/2006/math" xmlns="" val="1"/>
             </a:ext>
           </a:extLst>
         </p:spPr>
@@ -31591,7 +31592,7 @@
           </a:ln>
           <a:extLst>
             <a:ext uri="{C572A759-6A51-4108-AA02-DFA0A04FC94B}">
-              <ma14:wrappingTextBoxFlag xmlns="" xmlns:m="http://schemas.openxmlformats.org/officeDocument/2006/math" xmlns:a14="http://schemas.microsoft.com/office/drawing/2010/main" xmlns:ma14="http://schemas.microsoft.com/office/mac/drawingml/2011/main" val="1"/>
+              <ma14:wrappingTextBoxFlag xmlns:ma14="http://schemas.microsoft.com/office/mac/drawingml/2011/main" xmlns:a14="http://schemas.microsoft.com/office/drawing/2010/main" xmlns:m="http://schemas.openxmlformats.org/officeDocument/2006/math" xmlns="" val="1"/>
             </a:ext>
           </a:extLst>
         </p:spPr>
@@ -32327,7 +32328,7 @@
           </a:ln>
           <a:extLst>
             <a:ext uri="{C572A759-6A51-4108-AA02-DFA0A04FC94B}">
-              <ma14:wrappingTextBoxFlag xmlns="" xmlns:m="http://schemas.openxmlformats.org/officeDocument/2006/math" xmlns:a14="http://schemas.microsoft.com/office/drawing/2010/main" xmlns:ma14="http://schemas.microsoft.com/office/mac/drawingml/2011/main" val="1"/>
+              <ma14:wrappingTextBoxFlag xmlns:ma14="http://schemas.microsoft.com/office/mac/drawingml/2011/main" xmlns:a14="http://schemas.microsoft.com/office/drawing/2010/main" xmlns:m="http://schemas.openxmlformats.org/officeDocument/2006/math" xmlns="" val="1"/>
             </a:ext>
           </a:extLst>
         </p:spPr>
@@ -33108,7 +33109,7 @@
           </a:ln>
           <a:extLst>
             <a:ext uri="{C572A759-6A51-4108-AA02-DFA0A04FC94B}">
-              <ma14:wrappingTextBoxFlag xmlns="" xmlns:m="http://schemas.openxmlformats.org/officeDocument/2006/math" xmlns:a14="http://schemas.microsoft.com/office/drawing/2010/main" xmlns:ma14="http://schemas.microsoft.com/office/mac/drawingml/2011/main" val="1"/>
+              <ma14:wrappingTextBoxFlag xmlns:ma14="http://schemas.microsoft.com/office/mac/drawingml/2011/main" xmlns:a14="http://schemas.microsoft.com/office/drawing/2010/main" xmlns:m="http://schemas.openxmlformats.org/officeDocument/2006/math" xmlns="" val="1"/>
             </a:ext>
           </a:extLst>
         </p:spPr>
@@ -34145,7 +34146,7 @@
           </a:ln>
           <a:extLst>
             <a:ext uri="{C572A759-6A51-4108-AA02-DFA0A04FC94B}">
-              <ma14:wrappingTextBoxFlag xmlns="" xmlns:m="http://schemas.openxmlformats.org/officeDocument/2006/math" xmlns:a14="http://schemas.microsoft.com/office/drawing/2010/main" xmlns:ma14="http://schemas.microsoft.com/office/mac/drawingml/2011/main" val="1"/>
+              <ma14:wrappingTextBoxFlag xmlns:ma14="http://schemas.microsoft.com/office/mac/drawingml/2011/main" xmlns:a14="http://schemas.microsoft.com/office/drawing/2010/main" xmlns:m="http://schemas.openxmlformats.org/officeDocument/2006/math" xmlns="" val="1"/>
             </a:ext>
           </a:extLst>
         </p:spPr>
@@ -34993,7 +34994,7 @@
           </a:ln>
           <a:extLst>
             <a:ext uri="{C572A759-6A51-4108-AA02-DFA0A04FC94B}">
-              <ma14:wrappingTextBoxFlag xmlns="" xmlns:m="http://schemas.openxmlformats.org/officeDocument/2006/math" xmlns:a14="http://schemas.microsoft.com/office/drawing/2010/main" xmlns:ma14="http://schemas.microsoft.com/office/mac/drawingml/2011/main" val="1"/>
+              <ma14:wrappingTextBoxFlag xmlns:ma14="http://schemas.microsoft.com/office/mac/drawingml/2011/main" xmlns:a14="http://schemas.microsoft.com/office/drawing/2010/main" xmlns:m="http://schemas.openxmlformats.org/officeDocument/2006/math" xmlns="" val="1"/>
             </a:ext>
           </a:extLst>
         </p:spPr>
@@ -35907,7 +35908,7 @@
           </a:ln>
           <a:extLst>
             <a:ext uri="{C572A759-6A51-4108-AA02-DFA0A04FC94B}">
-              <ma14:wrappingTextBoxFlag xmlns="" xmlns:m="http://schemas.openxmlformats.org/officeDocument/2006/math" xmlns:a14="http://schemas.microsoft.com/office/drawing/2010/main" xmlns:ma14="http://schemas.microsoft.com/office/mac/drawingml/2011/main" val="1"/>
+              <ma14:wrappingTextBoxFlag xmlns:ma14="http://schemas.microsoft.com/office/mac/drawingml/2011/main" xmlns:a14="http://schemas.microsoft.com/office/drawing/2010/main" xmlns:m="http://schemas.openxmlformats.org/officeDocument/2006/math" xmlns="" val="1"/>
             </a:ext>
           </a:extLst>
         </p:spPr>
@@ -36552,7 +36553,7 @@
           </a:ln>
           <a:extLst>
             <a:ext uri="{C572A759-6A51-4108-AA02-DFA0A04FC94B}">
-              <ma14:wrappingTextBoxFlag xmlns="" xmlns:m="http://schemas.openxmlformats.org/officeDocument/2006/math" xmlns:a14="http://schemas.microsoft.com/office/drawing/2010/main" xmlns:ma14="http://schemas.microsoft.com/office/mac/drawingml/2011/main" val="1"/>
+              <ma14:wrappingTextBoxFlag xmlns:ma14="http://schemas.microsoft.com/office/mac/drawingml/2011/main" xmlns:a14="http://schemas.microsoft.com/office/drawing/2010/main" xmlns:m="http://schemas.openxmlformats.org/officeDocument/2006/math" xmlns="" val="1"/>
             </a:ext>
           </a:extLst>
         </p:spPr>
@@ -37040,7 +37041,7 @@
           </a:ln>
           <a:extLst>
             <a:ext uri="{C572A759-6A51-4108-AA02-DFA0A04FC94B}">
-              <ma14:wrappingTextBoxFlag xmlns="" xmlns:m="http://schemas.openxmlformats.org/officeDocument/2006/math" xmlns:a14="http://schemas.microsoft.com/office/drawing/2010/main" xmlns:ma14="http://schemas.microsoft.com/office/mac/drawingml/2011/main" val="1"/>
+              <ma14:wrappingTextBoxFlag xmlns:ma14="http://schemas.microsoft.com/office/mac/drawingml/2011/main" xmlns:a14="http://schemas.microsoft.com/office/drawing/2010/main" xmlns:m="http://schemas.openxmlformats.org/officeDocument/2006/math" xmlns="" val="1"/>
             </a:ext>
           </a:extLst>
         </p:spPr>
@@ -45045,6 +45046,70 @@
 </p:sld>
 </file>
 
+<file path=ppt/slides/slide55.xml><?xml version="1.0" encoding="utf-8"?>
+<p:sld xmlns:a="http://schemas.openxmlformats.org/drawingml/2006/main" xmlns:r="http://schemas.openxmlformats.org/officeDocument/2006/relationships" xmlns:p="http://schemas.openxmlformats.org/presentationml/2006/main">
+  <p:cSld>
+    <p:spTree>
+      <p:nvGrpSpPr>
+        <p:cNvPr id="1" name="">
+          <a:extLst>
+            <a:ext uri="{FF2B5EF4-FFF2-40B4-BE49-F238E27FC236}">
+              <a16:creationId xmlns:a16="http://schemas.microsoft.com/office/drawing/2014/main" id="{84DA25F2-3AE0-BDCF-0880-EDD5EEF55E54}"/>
+            </a:ext>
+          </a:extLst>
+        </p:cNvPr>
+        <p:cNvGrpSpPr/>
+        <p:nvPr/>
+      </p:nvGrpSpPr>
+      <p:grpSpPr>
+        <a:xfrm>
+          <a:off x="0" y="0"/>
+          <a:ext cx="0" cy="0"/>
+          <a:chOff x="0" y="0"/>
+          <a:chExt cx="0" cy="0"/>
+        </a:xfrm>
+      </p:grpSpPr>
+      <p:sp>
+        <p:nvSpPr>
+          <p:cNvPr id="2" name="Title 1">
+            <a:extLst>
+              <a:ext uri="{FF2B5EF4-FFF2-40B4-BE49-F238E27FC236}">
+                <a16:creationId xmlns:a16="http://schemas.microsoft.com/office/drawing/2014/main" id="{6EAE57A2-3A61-C5F8-EEFD-EA2961784338}"/>
+              </a:ext>
+            </a:extLst>
+          </p:cNvPr>
+          <p:cNvSpPr>
+            <a:spLocks noGrp="1"/>
+          </p:cNvSpPr>
+          <p:nvPr>
+            <p:ph type="ctrTitle"/>
+          </p:nvPr>
+        </p:nvSpPr>
+        <p:spPr/>
+        <p:txBody>
+          <a:bodyPr/>
+          <a:lstStyle/>
+          <a:p>
+            <a:r>
+              <a:rPr lang="en-US" dirty="0"/>
+              <a:t>… to here …</a:t>
+            </a:r>
+          </a:p>
+        </p:txBody>
+      </p:sp>
+    </p:spTree>
+    <p:extLst>
+      <p:ext uri="{BB962C8B-B14F-4D97-AF65-F5344CB8AC3E}">
+        <p14:creationId xmlns:p14="http://schemas.microsoft.com/office/powerpoint/2010/main" val="2815624037"/>
+      </p:ext>
+    </p:extLst>
+  </p:cSld>
+  <p:clrMapOvr>
+    <a:masterClrMapping/>
+  </p:clrMapOvr>
+</p:sld>
+</file>
+
 <file path=ppt/slides/slide6.xml><?xml version="1.0" encoding="utf-8"?>
 <p:sld xmlns:a="http://schemas.openxmlformats.org/drawingml/2006/main" xmlns:r="http://schemas.openxmlformats.org/officeDocument/2006/relationships" xmlns:p="http://schemas.openxmlformats.org/presentationml/2006/main">
   <p:cSld>
@@ -46272,7 +46337,7 @@
           </a:ln>
           <a:extLst>
             <a:ext uri="{C572A759-6A51-4108-AA02-DFA0A04FC94B}">
-              <ma14:wrappingTextBoxFlag xmlns="" xmlns:m="http://schemas.openxmlformats.org/officeDocument/2006/math" xmlns:a14="http://schemas.microsoft.com/office/drawing/2010/main" xmlns:ma14="http://schemas.microsoft.com/office/mac/drawingml/2011/main" val="1"/>
+              <ma14:wrappingTextBoxFlag xmlns:ma14="http://schemas.microsoft.com/office/mac/drawingml/2011/main" xmlns:a14="http://schemas.microsoft.com/office/drawing/2010/main" xmlns:m="http://schemas.openxmlformats.org/officeDocument/2006/math" xmlns="" val="1"/>
             </a:ext>
           </a:extLst>
         </p:spPr>
